--- a/output_pptx/Take_My_Life_And_Let_It_Be.pptx
+++ b/output_pptx/Take_My_Life_And_Let_It_Be.pptx
@@ -3118,8 +3118,8 @@
         </p:nvSpPr>
         <p:spPr>
           <a:xfrm>
-            <a:off x="594360" y="2683764"/>
-            <a:ext cx="11002975" cy="685800"/>
+            <a:off x="640080" y="2500884"/>
+            <a:ext cx="10911535" cy="731520"/>
           </a:xfrm>
           <a:prstGeom prst="rect">
             <a:avLst/>
@@ -3134,7 +3134,7 @@
           <a:p>
             <a:pPr algn="ctr"/>
             <a:r>
-              <a:rPr sz="4400" b="1" i="0">
+              <a:rPr sz="4800" b="1" i="0">
                 <a:solidFill>
                   <a:srgbClr val="FFFFFF"/>
                 </a:solidFill>
@@ -3153,8 +3153,8 @@
         </p:nvSpPr>
         <p:spPr>
           <a:xfrm>
-            <a:off x="594360" y="3406140"/>
-            <a:ext cx="11002975" cy="384048"/>
+            <a:off x="640080" y="3268980"/>
+            <a:ext cx="10911535" cy="365760"/>
           </a:xfrm>
           <a:prstGeom prst="rect">
             <a:avLst/>
@@ -3171,46 +3171,11 @@
             <a:r>
               <a:rPr sz="2400" b="0" i="1">
                 <a:solidFill>
-                  <a:srgbClr val="B4B4B4"/>
+                  <a:srgbClr val="AAAAAA"/>
                 </a:solidFill>
                 <a:latin typeface="Arial"/>
               </a:rPr>
               <a:t>watashi no inochi omoni sasage masu</a:t>
-            </a:r>
-          </a:p>
-        </p:txBody>
-      </p:sp>
-      <p:sp>
-        <p:nvSpPr>
-          <p:cNvPr id="4" name="TextBox 3"/>
-          <p:cNvSpPr txBox="1"/>
-          <p:nvPr/>
-        </p:nvSpPr>
-        <p:spPr>
-          <a:xfrm>
-            <a:off x="594360" y="3826764"/>
-            <a:ext cx="11002975" cy="347472"/>
-          </a:xfrm>
-          <a:prstGeom prst="rect">
-            <a:avLst/>
-          </a:prstGeom>
-          <a:noFill/>
-        </p:spPr>
-        <p:txBody>
-          <a:bodyPr wrap="square">
-            <a:spAutoFit/>
-          </a:bodyPr>
-          <a:lstStyle/>
-          <a:p>
-            <a:pPr algn="ctr"/>
-            <a:r>
-              <a:rPr sz="2000" b="0" i="1">
-                <a:solidFill>
-                  <a:srgbClr val="8C8C8C"/>
-                </a:solidFill>
-                <a:latin typeface="Arial"/>
-              </a:rPr>
-              <a:t/>
             </a:r>
           </a:p>
         </p:txBody>
@@ -3249,8 +3214,8 @@
         </p:nvSpPr>
         <p:spPr>
           <a:xfrm>
-            <a:off x="594360" y="2683764"/>
-            <a:ext cx="11002975" cy="685800"/>
+            <a:off x="640080" y="2500884"/>
+            <a:ext cx="10911535" cy="731520"/>
           </a:xfrm>
           <a:prstGeom prst="rect">
             <a:avLst/>
@@ -3265,7 +3230,7 @@
           <a:p>
             <a:pPr algn="ctr"/>
             <a:r>
-              <a:rPr sz="4400" b="1" i="0">
+              <a:rPr sz="4800" b="1" i="0">
                 <a:solidFill>
                   <a:srgbClr val="FFFFFF"/>
                 </a:solidFill>
@@ -3284,8 +3249,8 @@
         </p:nvSpPr>
         <p:spPr>
           <a:xfrm>
-            <a:off x="594360" y="3406140"/>
-            <a:ext cx="11002975" cy="384048"/>
+            <a:off x="640080" y="3268980"/>
+            <a:ext cx="10911535" cy="365760"/>
           </a:xfrm>
           <a:prstGeom prst="rect">
             <a:avLst/>
@@ -3302,46 +3267,11 @@
             <a:r>
               <a:rPr sz="2400" b="0" i="1">
                 <a:solidFill>
-                  <a:srgbClr val="B4B4B4"/>
+                  <a:srgbClr val="AAAAAA"/>
                 </a:solidFill>
                 <a:latin typeface="Arial"/>
               </a:rPr>
               <a:t>watashi no ishi wo omoni yudanemasu</a:t>
-            </a:r>
-          </a:p>
-        </p:txBody>
-      </p:sp>
-      <p:sp>
-        <p:nvSpPr>
-          <p:cNvPr id="4" name="TextBox 3"/>
-          <p:cNvSpPr txBox="1"/>
-          <p:nvPr/>
-        </p:nvSpPr>
-        <p:spPr>
-          <a:xfrm>
-            <a:off x="594360" y="3826764"/>
-            <a:ext cx="11002975" cy="347472"/>
-          </a:xfrm>
-          <a:prstGeom prst="rect">
-            <a:avLst/>
-          </a:prstGeom>
-          <a:noFill/>
-        </p:spPr>
-        <p:txBody>
-          <a:bodyPr wrap="square">
-            <a:spAutoFit/>
-          </a:bodyPr>
-          <a:lstStyle/>
-          <a:p>
-            <a:pPr algn="ctr"/>
-            <a:r>
-              <a:rPr sz="2000" b="0" i="1">
-                <a:solidFill>
-                  <a:srgbClr val="8C8C8C"/>
-                </a:solidFill>
-                <a:latin typeface="Arial"/>
-              </a:rPr>
-              <a:t/>
             </a:r>
           </a:p>
         </p:txBody>
@@ -3380,8 +3310,8 @@
         </p:nvSpPr>
         <p:spPr>
           <a:xfrm>
-            <a:off x="594360" y="2683764"/>
-            <a:ext cx="11002975" cy="685800"/>
+            <a:off x="640080" y="2500884"/>
+            <a:ext cx="10911535" cy="731520"/>
           </a:xfrm>
           <a:prstGeom prst="rect">
             <a:avLst/>
@@ -3396,7 +3326,7 @@
           <a:p>
             <a:pPr algn="ctr"/>
             <a:r>
-              <a:rPr sz="4400" b="1" i="0">
+              <a:rPr sz="4800" b="1" i="0">
                 <a:solidFill>
                   <a:srgbClr val="FFFFFF"/>
                 </a:solidFill>
@@ -3415,8 +3345,8 @@
         </p:nvSpPr>
         <p:spPr>
           <a:xfrm>
-            <a:off x="594360" y="3406140"/>
-            <a:ext cx="11002975" cy="384048"/>
+            <a:off x="640080" y="3268980"/>
+            <a:ext cx="10911535" cy="365760"/>
           </a:xfrm>
           <a:prstGeom prst="rect">
             <a:avLst/>
@@ -3433,46 +3363,11 @@
             <a:r>
               <a:rPr sz="2400" b="0" i="1">
                 <a:solidFill>
-                  <a:srgbClr val="B4B4B4"/>
+                  <a:srgbClr val="AAAAAA"/>
                 </a:solidFill>
                 <a:latin typeface="Arial"/>
               </a:rPr>
               <a:t>kokoro wosubete</a:t>
-            </a:r>
-          </a:p>
-        </p:txBody>
-      </p:sp>
-      <p:sp>
-        <p:nvSpPr>
-          <p:cNvPr id="4" name="TextBox 3"/>
-          <p:cNvSpPr txBox="1"/>
-          <p:nvPr/>
-        </p:nvSpPr>
-        <p:spPr>
-          <a:xfrm>
-            <a:off x="594360" y="3826764"/>
-            <a:ext cx="11002975" cy="347472"/>
-          </a:xfrm>
-          <a:prstGeom prst="rect">
-            <a:avLst/>
-          </a:prstGeom>
-          <a:noFill/>
-        </p:spPr>
-        <p:txBody>
-          <a:bodyPr wrap="square">
-            <a:spAutoFit/>
-          </a:bodyPr>
-          <a:lstStyle/>
-          <a:p>
-            <a:pPr algn="ctr"/>
-            <a:r>
-              <a:rPr sz="2000" b="0" i="1">
-                <a:solidFill>
-                  <a:srgbClr val="8C8C8C"/>
-                </a:solidFill>
-                <a:latin typeface="Arial"/>
-              </a:rPr>
-              <a:t/>
             </a:r>
           </a:p>
         </p:txBody>
@@ -3511,8 +3406,8 @@
         </p:nvSpPr>
         <p:spPr>
           <a:xfrm>
-            <a:off x="594360" y="2683764"/>
-            <a:ext cx="11002975" cy="685800"/>
+            <a:off x="640080" y="2500884"/>
+            <a:ext cx="10911535" cy="731520"/>
           </a:xfrm>
           <a:prstGeom prst="rect">
             <a:avLst/>
@@ -3527,7 +3422,7 @@
           <a:p>
             <a:pPr algn="ctr"/>
             <a:r>
-              <a:rPr sz="4400" b="1" i="0">
+              <a:rPr sz="4800" b="1" i="0">
                 <a:solidFill>
                   <a:srgbClr val="FFFFFF"/>
                 </a:solidFill>
@@ -3546,8 +3441,8 @@
         </p:nvSpPr>
         <p:spPr>
           <a:xfrm>
-            <a:off x="594360" y="3406140"/>
-            <a:ext cx="11002975" cy="384048"/>
+            <a:off x="640080" y="3268980"/>
+            <a:ext cx="10911535" cy="365760"/>
           </a:xfrm>
           <a:prstGeom prst="rect">
             <a:avLst/>
@@ -3564,46 +3459,11 @@
             <a:r>
               <a:rPr sz="2400" b="0" i="1">
                 <a:solidFill>
-                  <a:srgbClr val="B4B4B4"/>
+                  <a:srgbClr val="AAAAAA"/>
                 </a:solidFill>
                 <a:latin typeface="Arial"/>
               </a:rPr>
               <a:t>osametekudasai osametekudasai</a:t>
-            </a:r>
-          </a:p>
-        </p:txBody>
-      </p:sp>
-      <p:sp>
-        <p:nvSpPr>
-          <p:cNvPr id="4" name="TextBox 3"/>
-          <p:cNvSpPr txBox="1"/>
-          <p:nvPr/>
-        </p:nvSpPr>
-        <p:spPr>
-          <a:xfrm>
-            <a:off x="594360" y="3826764"/>
-            <a:ext cx="11002975" cy="347472"/>
-          </a:xfrm>
-          <a:prstGeom prst="rect">
-            <a:avLst/>
-          </a:prstGeom>
-          <a:noFill/>
-        </p:spPr>
-        <p:txBody>
-          <a:bodyPr wrap="square">
-            <a:spAutoFit/>
-          </a:bodyPr>
-          <a:lstStyle/>
-          <a:p>
-            <a:pPr algn="ctr"/>
-            <a:r>
-              <a:rPr sz="2000" b="0" i="1">
-                <a:solidFill>
-                  <a:srgbClr val="8C8C8C"/>
-                </a:solidFill>
-                <a:latin typeface="Arial"/>
-              </a:rPr>
-              <a:t/>
             </a:r>
           </a:p>
         </p:txBody>
@@ -3642,8 +3502,8 @@
         </p:nvSpPr>
         <p:spPr>
           <a:xfrm>
-            <a:off x="594360" y="2683764"/>
-            <a:ext cx="11002975" cy="685800"/>
+            <a:off x="640080" y="2500884"/>
+            <a:ext cx="10911535" cy="731520"/>
           </a:xfrm>
           <a:prstGeom prst="rect">
             <a:avLst/>
@@ -3658,7 +3518,7 @@
           <a:p>
             <a:pPr algn="ctr"/>
             <a:r>
-              <a:rPr sz="4400" b="1" i="0">
+              <a:rPr sz="4800" b="1" i="0">
                 <a:solidFill>
                   <a:srgbClr val="FFFFFF"/>
                 </a:solidFill>
@@ -3677,8 +3537,8 @@
         </p:nvSpPr>
         <p:spPr>
           <a:xfrm>
-            <a:off x="594360" y="3406140"/>
-            <a:ext cx="11002975" cy="384048"/>
+            <a:off x="640080" y="3268980"/>
+            <a:ext cx="10911535" cy="365760"/>
           </a:xfrm>
           <a:prstGeom prst="rect">
             <a:avLst/>
@@ -3695,46 +3555,11 @@
             <a:r>
               <a:rPr sz="2400" b="0" i="1">
                 <a:solidFill>
-                  <a:srgbClr val="B4B4B4"/>
+                  <a:srgbClr val="AAAAAA"/>
                 </a:solidFill>
                 <a:latin typeface="Arial"/>
               </a:rPr>
               <a:t>watashi no ai wo omoni sosogi masu</a:t>
-            </a:r>
-          </a:p>
-        </p:txBody>
-      </p:sp>
-      <p:sp>
-        <p:nvSpPr>
-          <p:cNvPr id="4" name="TextBox 3"/>
-          <p:cNvSpPr txBox="1"/>
-          <p:nvPr/>
-        </p:nvSpPr>
-        <p:spPr>
-          <a:xfrm>
-            <a:off x="594360" y="3826764"/>
-            <a:ext cx="11002975" cy="347472"/>
-          </a:xfrm>
-          <a:prstGeom prst="rect">
-            <a:avLst/>
-          </a:prstGeom>
-          <a:noFill/>
-        </p:spPr>
-        <p:txBody>
-          <a:bodyPr wrap="square">
-            <a:spAutoFit/>
-          </a:bodyPr>
-          <a:lstStyle/>
-          <a:p>
-            <a:pPr algn="ctr"/>
-            <a:r>
-              <a:rPr sz="2000" b="0" i="1">
-                <a:solidFill>
-                  <a:srgbClr val="8C8C8C"/>
-                </a:solidFill>
-                <a:latin typeface="Arial"/>
-              </a:rPr>
-              <a:t/>
             </a:r>
           </a:p>
         </p:txBody>
@@ -3773,8 +3598,8 @@
         </p:nvSpPr>
         <p:spPr>
           <a:xfrm>
-            <a:off x="594360" y="2683764"/>
-            <a:ext cx="11002975" cy="685800"/>
+            <a:off x="640080" y="2500884"/>
+            <a:ext cx="10911535" cy="731520"/>
           </a:xfrm>
           <a:prstGeom prst="rect">
             <a:avLst/>
@@ -3789,7 +3614,7 @@
           <a:p>
             <a:pPr algn="ctr"/>
             <a:r>
-              <a:rPr sz="4400" b="1" i="0">
+              <a:rPr sz="4800" b="1" i="0">
                 <a:solidFill>
                   <a:srgbClr val="FFFFFF"/>
                 </a:solidFill>
@@ -3808,8 +3633,8 @@
         </p:nvSpPr>
         <p:spPr>
           <a:xfrm>
-            <a:off x="594360" y="3406140"/>
-            <a:ext cx="11002975" cy="384048"/>
+            <a:off x="640080" y="3268980"/>
+            <a:ext cx="10911535" cy="365760"/>
           </a:xfrm>
           <a:prstGeom prst="rect">
             <a:avLst/>
@@ -3826,46 +3651,11 @@
             <a:r>
               <a:rPr sz="2400" b="0" i="1">
                 <a:solidFill>
-                  <a:srgbClr val="B4B4B4"/>
+                  <a:srgbClr val="AAAAAA"/>
                 </a:solidFill>
                 <a:latin typeface="Arial"/>
               </a:rPr>
               <a:t>omono mikatachini</a:t>
-            </a:r>
-          </a:p>
-        </p:txBody>
-      </p:sp>
-      <p:sp>
-        <p:nvSpPr>
-          <p:cNvPr id="4" name="TextBox 3"/>
-          <p:cNvSpPr txBox="1"/>
-          <p:nvPr/>
-        </p:nvSpPr>
-        <p:spPr>
-          <a:xfrm>
-            <a:off x="594360" y="3826764"/>
-            <a:ext cx="11002975" cy="347472"/>
-          </a:xfrm>
-          <a:prstGeom prst="rect">
-            <a:avLst/>
-          </a:prstGeom>
-          <a:noFill/>
-        </p:spPr>
-        <p:txBody>
-          <a:bodyPr wrap="square">
-            <a:spAutoFit/>
-          </a:bodyPr>
-          <a:lstStyle/>
-          <a:p>
-            <a:pPr algn="ctr"/>
-            <a:r>
-              <a:rPr sz="2000" b="0" i="1">
-                <a:solidFill>
-                  <a:srgbClr val="8C8C8C"/>
-                </a:solidFill>
-                <a:latin typeface="Arial"/>
-              </a:rPr>
-              <a:t/>
             </a:r>
           </a:p>
         </p:txBody>
@@ -3904,8 +3694,8 @@
         </p:nvSpPr>
         <p:spPr>
           <a:xfrm>
-            <a:off x="594360" y="2683764"/>
-            <a:ext cx="11002975" cy="685800"/>
+            <a:off x="640080" y="2500884"/>
+            <a:ext cx="10911535" cy="731520"/>
           </a:xfrm>
           <a:prstGeom prst="rect">
             <a:avLst/>
@@ -3920,7 +3710,7 @@
           <a:p>
             <a:pPr algn="ctr"/>
             <a:r>
-              <a:rPr sz="4400" b="1" i="0">
+              <a:rPr sz="4800" b="1" i="0">
                 <a:solidFill>
                   <a:srgbClr val="FFFFFF"/>
                 </a:solidFill>
@@ -3939,8 +3729,8 @@
         </p:nvSpPr>
         <p:spPr>
           <a:xfrm>
-            <a:off x="594360" y="3406140"/>
-            <a:ext cx="11002975" cy="384048"/>
+            <a:off x="640080" y="3268980"/>
+            <a:ext cx="10911535" cy="365760"/>
           </a:xfrm>
           <a:prstGeom prst="rect">
             <a:avLst/>
@@ -3957,46 +3747,11 @@
             <a:r>
               <a:rPr sz="2400" b="0" i="1">
                 <a:solidFill>
-                  <a:srgbClr val="B4B4B4"/>
+                  <a:srgbClr val="AAAAAA"/>
                 </a:solidFill>
                 <a:latin typeface="Arial"/>
               </a:rPr>
               <a:t>otsukurikudasai otsukurikudasai</a:t>
-            </a:r>
-          </a:p>
-        </p:txBody>
-      </p:sp>
-      <p:sp>
-        <p:nvSpPr>
-          <p:cNvPr id="4" name="TextBox 3"/>
-          <p:cNvSpPr txBox="1"/>
-          <p:nvPr/>
-        </p:nvSpPr>
-        <p:spPr>
-          <a:xfrm>
-            <a:off x="594360" y="3826764"/>
-            <a:ext cx="11002975" cy="347472"/>
-          </a:xfrm>
-          <a:prstGeom prst="rect">
-            <a:avLst/>
-          </a:prstGeom>
-          <a:noFill/>
-        </p:spPr>
-        <p:txBody>
-          <a:bodyPr wrap="square">
-            <a:spAutoFit/>
-          </a:bodyPr>
-          <a:lstStyle/>
-          <a:p>
-            <a:pPr algn="ctr"/>
-            <a:r>
-              <a:rPr sz="2000" b="0" i="1">
-                <a:solidFill>
-                  <a:srgbClr val="8C8C8C"/>
-                </a:solidFill>
-                <a:latin typeface="Arial"/>
-              </a:rPr>
-              <a:t/>
             </a:r>
           </a:p>
         </p:txBody>
@@ -4035,8 +3790,8 @@
         </p:nvSpPr>
         <p:spPr>
           <a:xfrm>
-            <a:off x="594360" y="2683764"/>
-            <a:ext cx="11002975" cy="685800"/>
+            <a:off x="640080" y="2500884"/>
+            <a:ext cx="10911535" cy="731520"/>
           </a:xfrm>
           <a:prstGeom prst="rect">
             <a:avLst/>
@@ -4051,7 +3806,7 @@
           <a:p>
             <a:pPr algn="ctr"/>
             <a:r>
-              <a:rPr sz="4400" b="1" i="0">
+              <a:rPr sz="4800" b="1" i="0">
                 <a:solidFill>
                   <a:srgbClr val="FFFFFF"/>
                 </a:solidFill>
@@ -4070,8 +3825,8 @@
         </p:nvSpPr>
         <p:spPr>
           <a:xfrm>
-            <a:off x="594360" y="3406140"/>
-            <a:ext cx="11002975" cy="384048"/>
+            <a:off x="640080" y="3268980"/>
+            <a:ext cx="10911535" cy="365760"/>
           </a:xfrm>
           <a:prstGeom prst="rect">
             <a:avLst/>
@@ -4088,46 +3843,11 @@
             <a:r>
               <a:rPr sz="2400" b="0" i="1">
                 <a:solidFill>
-                  <a:srgbClr val="B4B4B4"/>
+                  <a:srgbClr val="AAAAAA"/>
                 </a:solidFill>
                 <a:latin typeface="Arial"/>
               </a:rPr>
               <a:t>tada omono ai ni</a:t>
-            </a:r>
-          </a:p>
-        </p:txBody>
-      </p:sp>
-      <p:sp>
-        <p:nvSpPr>
-          <p:cNvPr id="4" name="TextBox 3"/>
-          <p:cNvSpPr txBox="1"/>
-          <p:nvPr/>
-        </p:nvSpPr>
-        <p:spPr>
-          <a:xfrm>
-            <a:off x="594360" y="3826764"/>
-            <a:ext cx="11002975" cy="347472"/>
-          </a:xfrm>
-          <a:prstGeom prst="rect">
-            <a:avLst/>
-          </a:prstGeom>
-          <a:noFill/>
-        </p:spPr>
-        <p:txBody>
-          <a:bodyPr wrap="square">
-            <a:spAutoFit/>
-          </a:bodyPr>
-          <a:lstStyle/>
-          <a:p>
-            <a:pPr algn="ctr"/>
-            <a:r>
-              <a:rPr sz="2000" b="0" i="1">
-                <a:solidFill>
-                  <a:srgbClr val="8C8C8C"/>
-                </a:solidFill>
-                <a:latin typeface="Arial"/>
-              </a:rPr>
-              <a:t/>
             </a:r>
           </a:p>
         </p:txBody>
@@ -4166,8 +3886,8 @@
         </p:nvSpPr>
         <p:spPr>
           <a:xfrm>
-            <a:off x="594360" y="2683764"/>
-            <a:ext cx="11002975" cy="685800"/>
+            <a:off x="640080" y="2500884"/>
+            <a:ext cx="10911535" cy="731520"/>
           </a:xfrm>
           <a:prstGeom prst="rect">
             <a:avLst/>
@@ -4182,7 +3902,7 @@
           <a:p>
             <a:pPr algn="ctr"/>
             <a:r>
-              <a:rPr sz="4400" b="1" i="0">
+              <a:rPr sz="4800" b="1" i="0">
                 <a:solidFill>
                   <a:srgbClr val="FFFFFF"/>
                 </a:solidFill>
@@ -4201,8 +3921,8 @@
         </p:nvSpPr>
         <p:spPr>
           <a:xfrm>
-            <a:off x="594360" y="3406140"/>
-            <a:ext cx="11002975" cy="384048"/>
+            <a:off x="640080" y="3268980"/>
+            <a:ext cx="10911535" cy="365760"/>
           </a:xfrm>
           <a:prstGeom prst="rect">
             <a:avLst/>
@@ -4219,46 +3939,11 @@
             <a:r>
               <a:rPr sz="2400" b="0" i="1">
                 <a:solidFill>
-                  <a:srgbClr val="B4B4B4"/>
+                  <a:srgbClr val="AAAAAA"/>
                 </a:solidFill>
                 <a:latin typeface="Arial"/>
               </a:rPr>
               <a:t>mita shitekudasai , mita shitekudasai</a:t>
-            </a:r>
-          </a:p>
-        </p:txBody>
-      </p:sp>
-      <p:sp>
-        <p:nvSpPr>
-          <p:cNvPr id="4" name="TextBox 3"/>
-          <p:cNvSpPr txBox="1"/>
-          <p:nvPr/>
-        </p:nvSpPr>
-        <p:spPr>
-          <a:xfrm>
-            <a:off x="594360" y="3826764"/>
-            <a:ext cx="11002975" cy="347472"/>
-          </a:xfrm>
-          <a:prstGeom prst="rect">
-            <a:avLst/>
-          </a:prstGeom>
-          <a:noFill/>
-        </p:spPr>
-        <p:txBody>
-          <a:bodyPr wrap="square">
-            <a:spAutoFit/>
-          </a:bodyPr>
-          <a:lstStyle/>
-          <a:p>
-            <a:pPr algn="ctr"/>
-            <a:r>
-              <a:rPr sz="2000" b="0" i="1">
-                <a:solidFill>
-                  <a:srgbClr val="8C8C8C"/>
-                </a:solidFill>
-                <a:latin typeface="Arial"/>
-              </a:rPr>
-              <a:t/>
             </a:r>
           </a:p>
         </p:txBody>
@@ -4297,8 +3982,8 @@
         </p:nvSpPr>
         <p:spPr>
           <a:xfrm>
-            <a:off x="594360" y="2683764"/>
-            <a:ext cx="11002975" cy="685800"/>
+            <a:off x="640080" y="2500884"/>
+            <a:ext cx="10911535" cy="731520"/>
           </a:xfrm>
           <a:prstGeom prst="rect">
             <a:avLst/>
@@ -4313,7 +3998,7 @@
           <a:p>
             <a:pPr algn="ctr"/>
             <a:r>
-              <a:rPr sz="4400" b="1" i="0">
+              <a:rPr sz="4800" b="1" i="0">
                 <a:solidFill>
                   <a:srgbClr val="FFFFFF"/>
                 </a:solidFill>
@@ -4332,8 +4017,8 @@
         </p:nvSpPr>
         <p:spPr>
           <a:xfrm>
-            <a:off x="594360" y="3406140"/>
-            <a:ext cx="11002975" cy="384048"/>
+            <a:off x="640080" y="3268980"/>
+            <a:ext cx="10911535" cy="365760"/>
           </a:xfrm>
           <a:prstGeom prst="rect">
             <a:avLst/>
@@ -4350,46 +4035,11 @@
             <a:r>
               <a:rPr sz="2400" b="0" i="1">
                 <a:solidFill>
-                  <a:srgbClr val="B4B4B4"/>
+                  <a:srgbClr val="AAAAAA"/>
                 </a:solidFill>
                 <a:latin typeface="Arial"/>
               </a:rPr>
               <a:t>watashi no teashi omoni naraimasu</a:t>
-            </a:r>
-          </a:p>
-        </p:txBody>
-      </p:sp>
-      <p:sp>
-        <p:nvSpPr>
-          <p:cNvPr id="4" name="TextBox 3"/>
-          <p:cNvSpPr txBox="1"/>
-          <p:nvPr/>
-        </p:nvSpPr>
-        <p:spPr>
-          <a:xfrm>
-            <a:off x="594360" y="3826764"/>
-            <a:ext cx="11002975" cy="347472"/>
-          </a:xfrm>
-          <a:prstGeom prst="rect">
-            <a:avLst/>
-          </a:prstGeom>
-          <a:noFill/>
-        </p:spPr>
-        <p:txBody>
-          <a:bodyPr wrap="square">
-            <a:spAutoFit/>
-          </a:bodyPr>
-          <a:lstStyle/>
-          <a:p>
-            <a:pPr algn="ctr"/>
-            <a:r>
-              <a:rPr sz="2000" b="0" i="1">
-                <a:solidFill>
-                  <a:srgbClr val="8C8C8C"/>
-                </a:solidFill>
-                <a:latin typeface="Arial"/>
-              </a:rPr>
-              <a:t/>
             </a:r>
           </a:p>
         </p:txBody>
@@ -4428,8 +4078,8 @@
         </p:nvSpPr>
         <p:spPr>
           <a:xfrm>
-            <a:off x="594360" y="2683764"/>
-            <a:ext cx="11002975" cy="685800"/>
+            <a:off x="640080" y="2500884"/>
+            <a:ext cx="10911535" cy="731520"/>
           </a:xfrm>
           <a:prstGeom prst="rect">
             <a:avLst/>
@@ -4444,7 +4094,7 @@
           <a:p>
             <a:pPr algn="ctr"/>
             <a:r>
-              <a:rPr sz="4400" b="1" i="0">
+              <a:rPr sz="4800" b="1" i="0">
                 <a:solidFill>
                   <a:srgbClr val="FFFFFF"/>
                 </a:solidFill>
@@ -4463,8 +4113,8 @@
         </p:nvSpPr>
         <p:spPr>
           <a:xfrm>
-            <a:off x="594360" y="3406140"/>
-            <a:ext cx="11002975" cy="384048"/>
+            <a:off x="640080" y="3268980"/>
+            <a:ext cx="10911535" cy="365760"/>
           </a:xfrm>
           <a:prstGeom prst="rect">
             <a:avLst/>
@@ -4481,46 +4131,11 @@
             <a:r>
               <a:rPr sz="2400" b="0" i="1">
                 <a:solidFill>
-                  <a:srgbClr val="B4B4B4"/>
+                  <a:srgbClr val="AAAAAA"/>
                 </a:solidFill>
                 <a:latin typeface="Arial"/>
               </a:rPr>
               <a:t>kono koe hatada</a:t>
-            </a:r>
-          </a:p>
-        </p:txBody>
-      </p:sp>
-      <p:sp>
-        <p:nvSpPr>
-          <p:cNvPr id="4" name="TextBox 3"/>
-          <p:cNvSpPr txBox="1"/>
-          <p:nvPr/>
-        </p:nvSpPr>
-        <p:spPr>
-          <a:xfrm>
-            <a:off x="594360" y="3826764"/>
-            <a:ext cx="11002975" cy="347472"/>
-          </a:xfrm>
-          <a:prstGeom prst="rect">
-            <a:avLst/>
-          </a:prstGeom>
-          <a:noFill/>
-        </p:spPr>
-        <p:txBody>
-          <a:bodyPr wrap="square">
-            <a:spAutoFit/>
-          </a:bodyPr>
-          <a:lstStyle/>
-          <a:p>
-            <a:pPr algn="ctr"/>
-            <a:r>
-              <a:rPr sz="2000" b="0" i="1">
-                <a:solidFill>
-                  <a:srgbClr val="8C8C8C"/>
-                </a:solidFill>
-                <a:latin typeface="Arial"/>
-              </a:rPr>
-              <a:t/>
             </a:r>
           </a:p>
         </p:txBody>
@@ -4559,8 +4174,8 @@
         </p:nvSpPr>
         <p:spPr>
           <a:xfrm>
-            <a:off x="594360" y="2683764"/>
-            <a:ext cx="11002975" cy="685800"/>
+            <a:off x="640080" y="2500884"/>
+            <a:ext cx="10911535" cy="731520"/>
           </a:xfrm>
           <a:prstGeom prst="rect">
             <a:avLst/>
@@ -4575,7 +4190,7 @@
           <a:p>
             <a:pPr algn="ctr"/>
             <a:r>
-              <a:rPr sz="4400" b="1" i="0">
+              <a:rPr sz="4800" b="1" i="0">
                 <a:solidFill>
                   <a:srgbClr val="FFFFFF"/>
                 </a:solidFill>
@@ -4594,8 +4209,8 @@
         </p:nvSpPr>
         <p:spPr>
           <a:xfrm>
-            <a:off x="594360" y="3406140"/>
-            <a:ext cx="11002975" cy="384048"/>
+            <a:off x="640080" y="3268980"/>
+            <a:ext cx="10911535" cy="365760"/>
           </a:xfrm>
           <a:prstGeom prst="rect">
             <a:avLst/>
@@ -4612,46 +4227,11 @@
             <a:r>
               <a:rPr sz="2400" b="0" i="1">
                 <a:solidFill>
-                  <a:srgbClr val="B4B4B4"/>
+                  <a:srgbClr val="AAAAAA"/>
                 </a:solidFill>
                 <a:latin typeface="Arial"/>
               </a:rPr>
               <a:t>shu wotataemasu shu wotataemasu</a:t>
-            </a:r>
-          </a:p>
-        </p:txBody>
-      </p:sp>
-      <p:sp>
-        <p:nvSpPr>
-          <p:cNvPr id="4" name="TextBox 3"/>
-          <p:cNvSpPr txBox="1"/>
-          <p:nvPr/>
-        </p:nvSpPr>
-        <p:spPr>
-          <a:xfrm>
-            <a:off x="594360" y="3826764"/>
-            <a:ext cx="11002975" cy="347472"/>
-          </a:xfrm>
-          <a:prstGeom prst="rect">
-            <a:avLst/>
-          </a:prstGeom>
-          <a:noFill/>
-        </p:spPr>
-        <p:txBody>
-          <a:bodyPr wrap="square">
-            <a:spAutoFit/>
-          </a:bodyPr>
-          <a:lstStyle/>
-          <a:p>
-            <a:pPr algn="ctr"/>
-            <a:r>
-              <a:rPr sz="2000" b="0" i="1">
-                <a:solidFill>
-                  <a:srgbClr val="8C8C8C"/>
-                </a:solidFill>
-                <a:latin typeface="Arial"/>
-              </a:rPr>
-              <a:t/>
             </a:r>
           </a:p>
         </p:txBody>
@@ -4690,8 +4270,8 @@
         </p:nvSpPr>
         <p:spPr>
           <a:xfrm>
-            <a:off x="594360" y="2683764"/>
-            <a:ext cx="11002975" cy="685800"/>
+            <a:off x="640080" y="2500884"/>
+            <a:ext cx="10911535" cy="731520"/>
           </a:xfrm>
           <a:prstGeom prst="rect">
             <a:avLst/>
@@ -4706,7 +4286,7 @@
           <a:p>
             <a:pPr algn="ctr"/>
             <a:r>
-              <a:rPr sz="4400" b="1" i="0">
+              <a:rPr sz="4800" b="1" i="0">
                 <a:solidFill>
                   <a:srgbClr val="FFFFFF"/>
                 </a:solidFill>
@@ -4725,8 +4305,8 @@
         </p:nvSpPr>
         <p:spPr>
           <a:xfrm>
-            <a:off x="594360" y="3406140"/>
-            <a:ext cx="11002975" cy="384048"/>
+            <a:off x="640080" y="3268980"/>
+            <a:ext cx="10911535" cy="365760"/>
           </a:xfrm>
           <a:prstGeom prst="rect">
             <a:avLst/>
@@ -4743,46 +4323,11 @@
             <a:r>
               <a:rPr sz="2400" b="0" i="1">
                 <a:solidFill>
-                  <a:srgbClr val="B4B4B4"/>
+                  <a:srgbClr val="AAAAAA"/>
                 </a:solidFill>
                 <a:latin typeface="Arial"/>
               </a:rPr>
               <a:t>watashi no kuchi ha shu wo tsutae masu</a:t>
-            </a:r>
-          </a:p>
-        </p:txBody>
-      </p:sp>
-      <p:sp>
-        <p:nvSpPr>
-          <p:cNvPr id="4" name="TextBox 3"/>
-          <p:cNvSpPr txBox="1"/>
-          <p:nvPr/>
-        </p:nvSpPr>
-        <p:spPr>
-          <a:xfrm>
-            <a:off x="594360" y="3826764"/>
-            <a:ext cx="11002975" cy="347472"/>
-          </a:xfrm>
-          <a:prstGeom prst="rect">
-            <a:avLst/>
-          </a:prstGeom>
-          <a:noFill/>
-        </p:spPr>
-        <p:txBody>
-          <a:bodyPr wrap="square">
-            <a:spAutoFit/>
-          </a:bodyPr>
-          <a:lstStyle/>
-          <a:p>
-            <a:pPr algn="ctr"/>
-            <a:r>
-              <a:rPr sz="2000" b="0" i="1">
-                <a:solidFill>
-                  <a:srgbClr val="8C8C8C"/>
-                </a:solidFill>
-                <a:latin typeface="Arial"/>
-              </a:rPr>
-              <a:t/>
             </a:r>
           </a:p>
         </p:txBody>
@@ -4821,8 +4366,8 @@
         </p:nvSpPr>
         <p:spPr>
           <a:xfrm>
-            <a:off x="594360" y="2683764"/>
-            <a:ext cx="11002975" cy="685800"/>
+            <a:off x="640080" y="2500884"/>
+            <a:ext cx="10911535" cy="731520"/>
           </a:xfrm>
           <a:prstGeom prst="rect">
             <a:avLst/>
@@ -4837,7 +4382,7 @@
           <a:p>
             <a:pPr algn="ctr"/>
             <a:r>
-              <a:rPr sz="4400" b="1" i="0">
+              <a:rPr sz="4800" b="1" i="0">
                 <a:solidFill>
                   <a:srgbClr val="FFFFFF"/>
                 </a:solidFill>
@@ -4856,8 +4401,8 @@
         </p:nvSpPr>
         <p:spPr>
           <a:xfrm>
-            <a:off x="594360" y="3406140"/>
-            <a:ext cx="11002975" cy="384048"/>
+            <a:off x="640080" y="3268980"/>
+            <a:ext cx="10911535" cy="365760"/>
           </a:xfrm>
           <a:prstGeom prst="rect">
             <a:avLst/>
@@ -4874,46 +4419,11 @@
             <a:r>
               <a:rPr sz="2400" b="0" i="1">
                 <a:solidFill>
-                  <a:srgbClr val="B4B4B4"/>
+                  <a:srgbClr val="AAAAAA"/>
                 </a:solidFill>
                 <a:latin typeface="Arial"/>
               </a:rPr>
               <a:t>subeteno tomi ha</a:t>
-            </a:r>
-          </a:p>
-        </p:txBody>
-      </p:sp>
-      <p:sp>
-        <p:nvSpPr>
-          <p:cNvPr id="4" name="TextBox 3"/>
-          <p:cNvSpPr txBox="1"/>
-          <p:nvPr/>
-        </p:nvSpPr>
-        <p:spPr>
-          <a:xfrm>
-            <a:off x="594360" y="3826764"/>
-            <a:ext cx="11002975" cy="347472"/>
-          </a:xfrm>
-          <a:prstGeom prst="rect">
-            <a:avLst/>
-          </a:prstGeom>
-          <a:noFill/>
-        </p:spPr>
-        <p:txBody>
-          <a:bodyPr wrap="square">
-            <a:spAutoFit/>
-          </a:bodyPr>
-          <a:lstStyle/>
-          <a:p>
-            <a:pPr algn="ctr"/>
-            <a:r>
-              <a:rPr sz="2000" b="0" i="1">
-                <a:solidFill>
-                  <a:srgbClr val="8C8C8C"/>
-                </a:solidFill>
-                <a:latin typeface="Arial"/>
-              </a:rPr>
-              <a:t/>
             </a:r>
           </a:p>
         </p:txBody>
@@ -4952,8 +4462,8 @@
         </p:nvSpPr>
         <p:spPr>
           <a:xfrm>
-            <a:off x="594360" y="2683764"/>
-            <a:ext cx="11002975" cy="685800"/>
+            <a:off x="640080" y="2500884"/>
+            <a:ext cx="10911535" cy="731520"/>
           </a:xfrm>
           <a:prstGeom prst="rect">
             <a:avLst/>
@@ -4968,7 +4478,7 @@
           <a:p>
             <a:pPr algn="ctr"/>
             <a:r>
-              <a:rPr sz="4400" b="1" i="0">
+              <a:rPr sz="4800" b="1" i="0">
                 <a:solidFill>
                   <a:srgbClr val="FFFFFF"/>
                 </a:solidFill>
@@ -4987,8 +4497,8 @@
         </p:nvSpPr>
         <p:spPr>
           <a:xfrm>
-            <a:off x="594360" y="3406140"/>
-            <a:ext cx="11002975" cy="384048"/>
+            <a:off x="640080" y="3268980"/>
+            <a:ext cx="10911535" cy="365760"/>
           </a:xfrm>
           <a:prstGeom prst="rect">
             <a:avLst/>
@@ -5005,46 +4515,11 @@
             <a:r>
               <a:rPr sz="2400" b="0" i="1">
                 <a:solidFill>
-                  <a:srgbClr val="B4B4B4"/>
+                  <a:srgbClr val="AAAAAA"/>
                 </a:solidFill>
                 <a:latin typeface="Arial"/>
               </a:rPr>
               <a:t>tada omono tameni tada omono tameni</a:t>
-            </a:r>
-          </a:p>
-        </p:txBody>
-      </p:sp>
-      <p:sp>
-        <p:nvSpPr>
-          <p:cNvPr id="4" name="TextBox 3"/>
-          <p:cNvSpPr txBox="1"/>
-          <p:nvPr/>
-        </p:nvSpPr>
-        <p:spPr>
-          <a:xfrm>
-            <a:off x="594360" y="3826764"/>
-            <a:ext cx="11002975" cy="347472"/>
-          </a:xfrm>
-          <a:prstGeom prst="rect">
-            <a:avLst/>
-          </a:prstGeom>
-          <a:noFill/>
-        </p:spPr>
-        <p:txBody>
-          <a:bodyPr wrap="square">
-            <a:spAutoFit/>
-          </a:bodyPr>
-          <a:lstStyle/>
-          <a:p>
-            <a:pPr algn="ctr"/>
-            <a:r>
-              <a:rPr sz="2000" b="0" i="1">
-                <a:solidFill>
-                  <a:srgbClr val="8C8C8C"/>
-                </a:solidFill>
-                <a:latin typeface="Arial"/>
-              </a:rPr>
-              <a:t/>
             </a:r>
           </a:p>
         </p:txBody>

--- a/output_pptx/Take_My_Life_And_Let_It_Be.pptx
+++ b/output_pptx/Take_My_Life_And_Let_It_Be.pptx
@@ -3180,6 +3180,41 @@
           </a:p>
         </p:txBody>
       </p:sp>
+      <p:sp>
+        <p:nvSpPr>
+          <p:cNvPr id="4" name="TextBox 3"/>
+          <p:cNvSpPr txBox="1"/>
+          <p:nvPr/>
+        </p:nvSpPr>
+        <p:spPr>
+          <a:xfrm>
+            <a:off x="640080" y="4046220"/>
+            <a:ext cx="10911535" cy="310896"/>
+          </a:xfrm>
+          <a:prstGeom prst="rect">
+            <a:avLst/>
+          </a:prstGeom>
+          <a:noFill/>
+        </p:spPr>
+        <p:txBody>
+          <a:bodyPr wrap="square">
+            <a:spAutoFit/>
+          </a:bodyPr>
+          <a:lstStyle/>
+          <a:p>
+            <a:pPr algn="ctr"/>
+            <a:r>
+              <a:rPr sz="2000" b="0" i="1">
+                <a:solidFill>
+                  <a:srgbClr val="828282"/>
+                </a:solidFill>
+                <a:latin typeface="Arial"/>
+              </a:rPr>
+              <a:t>Entrego minha vida ao Senhor</a:t>
+            </a:r>
+          </a:p>
+        </p:txBody>
+      </p:sp>
     </p:spTree>
   </p:cSld>
   <p:clrMapOvr>
@@ -3276,6 +3311,41 @@
           </a:p>
         </p:txBody>
       </p:sp>
+      <p:sp>
+        <p:nvSpPr>
+          <p:cNvPr id="4" name="TextBox 3"/>
+          <p:cNvSpPr txBox="1"/>
+          <p:nvPr/>
+        </p:nvSpPr>
+        <p:spPr>
+          <a:xfrm>
+            <a:off x="640080" y="4046220"/>
+            <a:ext cx="10911535" cy="310896"/>
+          </a:xfrm>
+          <a:prstGeom prst="rect">
+            <a:avLst/>
+          </a:prstGeom>
+          <a:noFill/>
+        </p:spPr>
+        <p:txBody>
+          <a:bodyPr wrap="square">
+            <a:spAutoFit/>
+          </a:bodyPr>
+          <a:lstStyle/>
+          <a:p>
+            <a:pPr algn="ctr"/>
+            <a:r>
+              <a:rPr sz="2000" b="0" i="1">
+                <a:solidFill>
+                  <a:srgbClr val="828282"/>
+                </a:solidFill>
+                <a:latin typeface="Arial"/>
+              </a:rPr>
+              <a:t>Entrego minha vontade ao Senhor</a:t>
+            </a:r>
+          </a:p>
+        </p:txBody>
+      </p:sp>
     </p:spTree>
   </p:cSld>
   <p:clrMapOvr>
@@ -3372,6 +3442,41 @@
           </a:p>
         </p:txBody>
       </p:sp>
+      <p:sp>
+        <p:nvSpPr>
+          <p:cNvPr id="4" name="TextBox 3"/>
+          <p:cNvSpPr txBox="1"/>
+          <p:nvPr/>
+        </p:nvSpPr>
+        <p:spPr>
+          <a:xfrm>
+            <a:off x="640080" y="4046220"/>
+            <a:ext cx="10911535" cy="310896"/>
+          </a:xfrm>
+          <a:prstGeom prst="rect">
+            <a:avLst/>
+          </a:prstGeom>
+          <a:noFill/>
+        </p:spPr>
+        <p:txBody>
+          <a:bodyPr wrap="square">
+            <a:spAutoFit/>
+          </a:bodyPr>
+          <a:lstStyle/>
+          <a:p>
+            <a:pPr algn="ctr"/>
+            <a:r>
+              <a:rPr sz="2000" b="0" i="1">
+                <a:solidFill>
+                  <a:srgbClr val="828282"/>
+                </a:solidFill>
+                <a:latin typeface="Arial"/>
+              </a:rPr>
+              <a:t>Todo meu coração</a:t>
+            </a:r>
+          </a:p>
+        </p:txBody>
+      </p:sp>
     </p:spTree>
   </p:cSld>
   <p:clrMapOvr>
@@ -3468,6 +3573,41 @@
           </a:p>
         </p:txBody>
       </p:sp>
+      <p:sp>
+        <p:nvSpPr>
+          <p:cNvPr id="4" name="TextBox 3"/>
+          <p:cNvSpPr txBox="1"/>
+          <p:nvPr/>
+        </p:nvSpPr>
+        <p:spPr>
+          <a:xfrm>
+            <a:off x="640080" y="4046220"/>
+            <a:ext cx="10911535" cy="310896"/>
+          </a:xfrm>
+          <a:prstGeom prst="rect">
+            <a:avLst/>
+          </a:prstGeom>
+          <a:noFill/>
+        </p:spPr>
+        <p:txBody>
+          <a:bodyPr wrap="square">
+            <a:spAutoFit/>
+          </a:bodyPr>
+          <a:lstStyle/>
+          <a:p>
+            <a:pPr algn="ctr"/>
+            <a:r>
+              <a:rPr sz="2000" b="0" i="1">
+                <a:solidFill>
+                  <a:srgbClr val="828282"/>
+                </a:solidFill>
+                <a:latin typeface="Arial"/>
+              </a:rPr>
+              <a:t>Tome, tome</a:t>
+            </a:r>
+          </a:p>
+        </p:txBody>
+      </p:sp>
     </p:spTree>
   </p:cSld>
   <p:clrMapOvr>
@@ -3564,6 +3704,41 @@
           </a:p>
         </p:txBody>
       </p:sp>
+      <p:sp>
+        <p:nvSpPr>
+          <p:cNvPr id="4" name="TextBox 3"/>
+          <p:cNvSpPr txBox="1"/>
+          <p:nvPr/>
+        </p:nvSpPr>
+        <p:spPr>
+          <a:xfrm>
+            <a:off x="640080" y="4046220"/>
+            <a:ext cx="10911535" cy="310896"/>
+          </a:xfrm>
+          <a:prstGeom prst="rect">
+            <a:avLst/>
+          </a:prstGeom>
+          <a:noFill/>
+        </p:spPr>
+        <p:txBody>
+          <a:bodyPr wrap="square">
+            <a:spAutoFit/>
+          </a:bodyPr>
+          <a:lstStyle/>
+          <a:p>
+            <a:pPr algn="ctr"/>
+            <a:r>
+              <a:rPr sz="2000" b="0" i="1">
+                <a:solidFill>
+                  <a:srgbClr val="828282"/>
+                </a:solidFill>
+                <a:latin typeface="Arial"/>
+              </a:rPr>
+              <a:t>Derramarei meu amor no Senhor</a:t>
+            </a:r>
+          </a:p>
+        </p:txBody>
+      </p:sp>
     </p:spTree>
   </p:cSld>
   <p:clrMapOvr>
@@ -3660,6 +3835,41 @@
           </a:p>
         </p:txBody>
       </p:sp>
+      <p:sp>
+        <p:nvSpPr>
+          <p:cNvPr id="4" name="TextBox 3"/>
+          <p:cNvSpPr txBox="1"/>
+          <p:nvPr/>
+        </p:nvSpPr>
+        <p:spPr>
+          <a:xfrm>
+            <a:off x="640080" y="4046220"/>
+            <a:ext cx="10911535" cy="310896"/>
+          </a:xfrm>
+          <a:prstGeom prst="rect">
+            <a:avLst/>
+          </a:prstGeom>
+          <a:noFill/>
+        </p:spPr>
+        <p:txBody>
+          <a:bodyPr wrap="square">
+            <a:spAutoFit/>
+          </a:bodyPr>
+          <a:lstStyle/>
+          <a:p>
+            <a:pPr algn="ctr"/>
+            <a:r>
+              <a:rPr sz="2000" b="0" i="1">
+                <a:solidFill>
+                  <a:srgbClr val="828282"/>
+                </a:solidFill>
+                <a:latin typeface="Arial"/>
+              </a:rPr>
+              <a:t>À imagem do Senhor</a:t>
+            </a:r>
+          </a:p>
+        </p:txBody>
+      </p:sp>
     </p:spTree>
   </p:cSld>
   <p:clrMapOvr>
@@ -3756,6 +3966,41 @@
           </a:p>
         </p:txBody>
       </p:sp>
+      <p:sp>
+        <p:nvSpPr>
+          <p:cNvPr id="4" name="TextBox 3"/>
+          <p:cNvSpPr txBox="1"/>
+          <p:nvPr/>
+        </p:nvSpPr>
+        <p:spPr>
+          <a:xfrm>
+            <a:off x="640080" y="4046220"/>
+            <a:ext cx="10911535" cy="310896"/>
+          </a:xfrm>
+          <a:prstGeom prst="rect">
+            <a:avLst/>
+          </a:prstGeom>
+          <a:noFill/>
+        </p:spPr>
+        <p:txBody>
+          <a:bodyPr wrap="square">
+            <a:spAutoFit/>
+          </a:bodyPr>
+          <a:lstStyle/>
+          <a:p>
+            <a:pPr algn="ctr"/>
+            <a:r>
+              <a:rPr sz="2000" b="0" i="1">
+                <a:solidFill>
+                  <a:srgbClr val="828282"/>
+                </a:solidFill>
+                <a:latin typeface="Arial"/>
+              </a:rPr>
+              <a:t>Faça-me, faça-me</a:t>
+            </a:r>
+          </a:p>
+        </p:txBody>
+      </p:sp>
     </p:spTree>
   </p:cSld>
   <p:clrMapOvr>
@@ -3852,6 +4097,41 @@
           </a:p>
         </p:txBody>
       </p:sp>
+      <p:sp>
+        <p:nvSpPr>
+          <p:cNvPr id="4" name="TextBox 3"/>
+          <p:cNvSpPr txBox="1"/>
+          <p:nvPr/>
+        </p:nvSpPr>
+        <p:spPr>
+          <a:xfrm>
+            <a:off x="640080" y="4046220"/>
+            <a:ext cx="10911535" cy="310896"/>
+          </a:xfrm>
+          <a:prstGeom prst="rect">
+            <a:avLst/>
+          </a:prstGeom>
+          <a:noFill/>
+        </p:spPr>
+        <p:txBody>
+          <a:bodyPr wrap="square">
+            <a:spAutoFit/>
+          </a:bodyPr>
+          <a:lstStyle/>
+          <a:p>
+            <a:pPr algn="ctr"/>
+            <a:r>
+              <a:rPr sz="2000" b="0" i="1">
+                <a:solidFill>
+                  <a:srgbClr val="828282"/>
+                </a:solidFill>
+                <a:latin typeface="Arial"/>
+              </a:rPr>
+              <a:t>Apenas no amor do Senhor</a:t>
+            </a:r>
+          </a:p>
+        </p:txBody>
+      </p:sp>
     </p:spTree>
   </p:cSld>
   <p:clrMapOvr>
@@ -3948,6 +4228,41 @@
           </a:p>
         </p:txBody>
       </p:sp>
+      <p:sp>
+        <p:nvSpPr>
+          <p:cNvPr id="4" name="TextBox 3"/>
+          <p:cNvSpPr txBox="1"/>
+          <p:nvPr/>
+        </p:nvSpPr>
+        <p:spPr>
+          <a:xfrm>
+            <a:off x="640080" y="4046220"/>
+            <a:ext cx="10911535" cy="310896"/>
+          </a:xfrm>
+          <a:prstGeom prst="rect">
+            <a:avLst/>
+          </a:prstGeom>
+          <a:noFill/>
+        </p:spPr>
+        <p:txBody>
+          <a:bodyPr wrap="square">
+            <a:spAutoFit/>
+          </a:bodyPr>
+          <a:lstStyle/>
+          <a:p>
+            <a:pPr algn="ctr"/>
+            <a:r>
+              <a:rPr sz="2000" b="0" i="1">
+                <a:solidFill>
+                  <a:srgbClr val="828282"/>
+                </a:solidFill>
+                <a:latin typeface="Arial"/>
+              </a:rPr>
+              <a:t>Preencha-me, preencha-me</a:t>
+            </a:r>
+          </a:p>
+        </p:txBody>
+      </p:sp>
     </p:spTree>
   </p:cSld>
   <p:clrMapOvr>
@@ -4044,6 +4359,41 @@
           </a:p>
         </p:txBody>
       </p:sp>
+      <p:sp>
+        <p:nvSpPr>
+          <p:cNvPr id="4" name="TextBox 3"/>
+          <p:cNvSpPr txBox="1"/>
+          <p:nvPr/>
+        </p:nvSpPr>
+        <p:spPr>
+          <a:xfrm>
+            <a:off x="640080" y="4046220"/>
+            <a:ext cx="10911535" cy="310896"/>
+          </a:xfrm>
+          <a:prstGeom prst="rect">
+            <a:avLst/>
+          </a:prstGeom>
+          <a:noFill/>
+        </p:spPr>
+        <p:txBody>
+          <a:bodyPr wrap="square">
+            <a:spAutoFit/>
+          </a:bodyPr>
+          <a:lstStyle/>
+          <a:p>
+            <a:pPr algn="ctr"/>
+            <a:r>
+              <a:rPr sz="2000" b="0" i="1">
+                <a:solidFill>
+                  <a:srgbClr val="828282"/>
+                </a:solidFill>
+                <a:latin typeface="Arial"/>
+              </a:rPr>
+              <a:t>Sigo os passos do Senhor com mãos e pés</a:t>
+            </a:r>
+          </a:p>
+        </p:txBody>
+      </p:sp>
     </p:spTree>
   </p:cSld>
   <p:clrMapOvr>
@@ -4140,6 +4490,41 @@
           </a:p>
         </p:txBody>
       </p:sp>
+      <p:sp>
+        <p:nvSpPr>
+          <p:cNvPr id="4" name="TextBox 3"/>
+          <p:cNvSpPr txBox="1"/>
+          <p:nvPr/>
+        </p:nvSpPr>
+        <p:spPr>
+          <a:xfrm>
+            <a:off x="640080" y="4046220"/>
+            <a:ext cx="10911535" cy="310896"/>
+          </a:xfrm>
+          <a:prstGeom prst="rect">
+            <a:avLst/>
+          </a:prstGeom>
+          <a:noFill/>
+        </p:spPr>
+        <p:txBody>
+          <a:bodyPr wrap="square">
+            <a:spAutoFit/>
+          </a:bodyPr>
+          <a:lstStyle/>
+          <a:p>
+            <a:pPr algn="ctr"/>
+            <a:r>
+              <a:rPr sz="2000" b="0" i="1">
+                <a:solidFill>
+                  <a:srgbClr val="828282"/>
+                </a:solidFill>
+                <a:latin typeface="Arial"/>
+              </a:rPr>
+              <a:t>Esta voz é somente</a:t>
+            </a:r>
+          </a:p>
+        </p:txBody>
+      </p:sp>
     </p:spTree>
   </p:cSld>
   <p:clrMapOvr>
@@ -4236,6 +4621,41 @@
           </a:p>
         </p:txBody>
       </p:sp>
+      <p:sp>
+        <p:nvSpPr>
+          <p:cNvPr id="4" name="TextBox 3"/>
+          <p:cNvSpPr txBox="1"/>
+          <p:nvPr/>
+        </p:nvSpPr>
+        <p:spPr>
+          <a:xfrm>
+            <a:off x="640080" y="4046220"/>
+            <a:ext cx="10911535" cy="310896"/>
+          </a:xfrm>
+          <a:prstGeom prst="rect">
+            <a:avLst/>
+          </a:prstGeom>
+          <a:noFill/>
+        </p:spPr>
+        <p:txBody>
+          <a:bodyPr wrap="square">
+            <a:spAutoFit/>
+          </a:bodyPr>
+          <a:lstStyle/>
+          <a:p>
+            <a:pPr algn="ctr"/>
+            <a:r>
+              <a:rPr sz="2000" b="0" i="1">
+                <a:solidFill>
+                  <a:srgbClr val="828282"/>
+                </a:solidFill>
+                <a:latin typeface="Arial"/>
+              </a:rPr>
+              <a:t>Louvo o Senhor, louvo o Senhor</a:t>
+            </a:r>
+          </a:p>
+        </p:txBody>
+      </p:sp>
     </p:spTree>
   </p:cSld>
   <p:clrMapOvr>
@@ -4332,6 +4752,41 @@
           </a:p>
         </p:txBody>
       </p:sp>
+      <p:sp>
+        <p:nvSpPr>
+          <p:cNvPr id="4" name="TextBox 3"/>
+          <p:cNvSpPr txBox="1"/>
+          <p:nvPr/>
+        </p:nvSpPr>
+        <p:spPr>
+          <a:xfrm>
+            <a:off x="640080" y="4046220"/>
+            <a:ext cx="10911535" cy="310896"/>
+          </a:xfrm>
+          <a:prstGeom prst="rect">
+            <a:avLst/>
+          </a:prstGeom>
+          <a:noFill/>
+        </p:spPr>
+        <p:txBody>
+          <a:bodyPr wrap="square">
+            <a:spAutoFit/>
+          </a:bodyPr>
+          <a:lstStyle/>
+          <a:p>
+            <a:pPr algn="ctr"/>
+            <a:r>
+              <a:rPr sz="2000" b="0" i="1">
+                <a:solidFill>
+                  <a:srgbClr val="828282"/>
+                </a:solidFill>
+                <a:latin typeface="Arial"/>
+              </a:rPr>
+              <a:t>Minha boca proclama o Senhor</a:t>
+            </a:r>
+          </a:p>
+        </p:txBody>
+      </p:sp>
     </p:spTree>
   </p:cSld>
   <p:clrMapOvr>
@@ -4428,6 +4883,41 @@
           </a:p>
         </p:txBody>
       </p:sp>
+      <p:sp>
+        <p:nvSpPr>
+          <p:cNvPr id="4" name="TextBox 3"/>
+          <p:cNvSpPr txBox="1"/>
+          <p:nvPr/>
+        </p:nvSpPr>
+        <p:spPr>
+          <a:xfrm>
+            <a:off x="640080" y="4046220"/>
+            <a:ext cx="10911535" cy="310896"/>
+          </a:xfrm>
+          <a:prstGeom prst="rect">
+            <a:avLst/>
+          </a:prstGeom>
+          <a:noFill/>
+        </p:spPr>
+        <p:txBody>
+          <a:bodyPr wrap="square">
+            <a:spAutoFit/>
+          </a:bodyPr>
+          <a:lstStyle/>
+          <a:p>
+            <a:pPr algn="ctr"/>
+            <a:r>
+              <a:rPr sz="2000" b="0" i="1">
+                <a:solidFill>
+                  <a:srgbClr val="828282"/>
+                </a:solidFill>
+                <a:latin typeface="Arial"/>
+              </a:rPr>
+              <a:t>Toda riqueza</a:t>
+            </a:r>
+          </a:p>
+        </p:txBody>
+      </p:sp>
     </p:spTree>
   </p:cSld>
   <p:clrMapOvr>
@@ -4520,6 +5010,41 @@
                 <a:latin typeface="Arial"/>
               </a:rPr>
               <a:t>tada omono tameni tada omono tameni</a:t>
+            </a:r>
+          </a:p>
+        </p:txBody>
+      </p:sp>
+      <p:sp>
+        <p:nvSpPr>
+          <p:cNvPr id="4" name="TextBox 3"/>
+          <p:cNvSpPr txBox="1"/>
+          <p:nvPr/>
+        </p:nvSpPr>
+        <p:spPr>
+          <a:xfrm>
+            <a:off x="640080" y="4046220"/>
+            <a:ext cx="10911535" cy="310896"/>
+          </a:xfrm>
+          <a:prstGeom prst="rect">
+            <a:avLst/>
+          </a:prstGeom>
+          <a:noFill/>
+        </p:spPr>
+        <p:txBody>
+          <a:bodyPr wrap="square">
+            <a:spAutoFit/>
+          </a:bodyPr>
+          <a:lstStyle/>
+          <a:p>
+            <a:pPr algn="ctr"/>
+            <a:r>
+              <a:rPr sz="2000" b="0" i="1">
+                <a:solidFill>
+                  <a:srgbClr val="828282"/>
+                </a:solidFill>
+                <a:latin typeface="Arial"/>
+              </a:rPr>
+              <a:t>Apenas para o Senhor, apenas para o Senhor</a:t>
             </a:r>
           </a:p>
         </p:txBody>
